--- a/demo-assets/investment-report-sample.pptx
+++ b/demo-assets/investment-report-sample.pptx
@@ -4446,7 +4446,7 @@
               </a:defRPr>
             </a:pPr>
             <a:r>
-              <a:t>USD 557.7 mn</a:t>
+              <a:t>USD 509.2 mn</a:t>
             </a:r>
           </a:p>
           <a:p>
@@ -4462,7 +4462,7 @@
               </a:defRPr>
             </a:pPr>
             <a:r>
-              <a:t>Action Get FX Rate, 86.42 at 2026-06-30</a:t>
+              <a:t>Action Get FX Rate, 94.66 at 2026-06-30</a:t>
             </a:r>
           </a:p>
         </p:txBody>
